--- a/文件/初審圖/系統架構圖素材/系統架構圖_Google簡報.pptx
+++ b/文件/初審圖/系統架構圖素材/系統架構圖_Google簡報.pptx
@@ -7,7 +7,7 @@
   <p:sldIdLst>
     <p:sldId id="256" r:id="rId7"/>
   </p:sldIdLst>
-  <p:sldSz cx="18097500" cy="9525000" type="screen4x3"/>
+  <p:sldSz cx="9144000" cy="5143500" type="screen4x3"/>
   <p:notesSz cx="6858000" cy="9144000"/>
   <p:defaultTextStyle>
     <a:defPPr>
@@ -3081,6 +3081,14 @@
 <file path=ppt/slides/slide1.xml><?xml version="1.0" encoding="utf-8"?>
 <p:sld xmlns:a="http://schemas.openxmlformats.org/drawingml/2006/main" xmlns:p="http://schemas.openxmlformats.org/presentationml/2006/main" xmlns:r="http://schemas.openxmlformats.org/officeDocument/2006/relationships">
   <p:cSld>
+    <p:bg>
+      <p:bgPr>
+        <a:solidFill>
+          <a:srgbClr val="FFFCF4"/>
+        </a:solidFill>
+        <a:effectLst/>
+      </p:bgPr>
+    </p:bg>
     <p:spTree>
       <p:nvGrpSpPr>
         <p:cNvPr id="1" name=""/>
@@ -3104,8 +3112,8 @@
         </p:blipFill>
         <p:spPr>
           <a:xfrm>
-            <a:off x="0" y="0"/>
-            <a:ext cx="18097500" cy="9525000"/>
+            <a:off x="0" y="330868"/>
+            <a:ext cx="9144000" cy="4812631"/>
           </a:xfrm>
           <a:prstGeom prst="rect">
             <a:avLst/>
@@ -3128,8 +3136,8 @@
         </p:blipFill>
         <p:spPr>
           <a:xfrm>
-            <a:off x="57150" y="5715000"/>
-            <a:ext cx="2133600" cy="590550"/>
+            <a:off x="28875" y="3218447"/>
+            <a:ext cx="1078029" cy="298383"/>
           </a:xfrm>
           <a:prstGeom prst="rect">
             <a:avLst/>
@@ -3152,8 +3160,8 @@
         </p:blipFill>
         <p:spPr>
           <a:xfrm>
-            <a:off x="-38100" y="3505200"/>
-            <a:ext cx="2381250" cy="2457450"/>
+            <a:off x="-19250" y="2101916"/>
+            <a:ext cx="1203157" cy="1241658"/>
           </a:xfrm>
           <a:prstGeom prst="rect">
             <a:avLst/>
@@ -3176,8 +3184,8 @@
         </p:blipFill>
         <p:spPr>
           <a:xfrm>
-            <a:off x="2495550" y="3048000"/>
-            <a:ext cx="7391400" cy="3714750"/>
+            <a:off x="1260909" y="1870910"/>
+            <a:ext cx="3734602" cy="1876926"/>
           </a:xfrm>
           <a:prstGeom prst="rect">
             <a:avLst/>
@@ -3200,8 +3208,8 @@
         </p:blipFill>
         <p:spPr>
           <a:xfrm>
-            <a:off x="3714750" y="2171700"/>
-            <a:ext cx="1524000" cy="2400300"/>
+            <a:off x="1876926" y="1428148"/>
+            <a:ext cx="770021" cy="1212783"/>
           </a:xfrm>
           <a:prstGeom prst="rect">
             <a:avLst/>
@@ -3224,8 +3232,8 @@
         </p:blipFill>
         <p:spPr>
           <a:xfrm>
-            <a:off x="6991350" y="2114550"/>
-            <a:ext cx="2952750" cy="2457450"/>
+            <a:off x="3532471" y="1399272"/>
+            <a:ext cx="1491915" cy="1241658"/>
           </a:xfrm>
           <a:prstGeom prst="rect">
             <a:avLst/>
@@ -3248,8 +3256,8 @@
         </p:blipFill>
         <p:spPr>
           <a:xfrm>
-            <a:off x="5505450" y="4800600"/>
-            <a:ext cx="1371600" cy="1123950"/>
+            <a:off x="2781701" y="2756434"/>
+            <a:ext cx="693018" cy="567890"/>
           </a:xfrm>
           <a:prstGeom prst="rect">
             <a:avLst/>
@@ -3272,8 +3280,8 @@
         </p:blipFill>
         <p:spPr>
           <a:xfrm>
-            <a:off x="3238500" y="7429500"/>
-            <a:ext cx="685800" cy="685800"/>
+            <a:off x="1636294" y="4084721"/>
+            <a:ext cx="346509" cy="346509"/>
           </a:xfrm>
           <a:prstGeom prst="rect">
             <a:avLst/>
@@ -3296,8 +3304,8 @@
         </p:blipFill>
         <p:spPr>
           <a:xfrm>
-            <a:off x="4495800" y="7429500"/>
-            <a:ext cx="685800" cy="685800"/>
+            <a:off x="2271562" y="4084721"/>
+            <a:ext cx="346509" cy="346509"/>
           </a:xfrm>
           <a:prstGeom prst="rect">
             <a:avLst/>
@@ -3320,8 +3328,8 @@
         </p:blipFill>
         <p:spPr>
           <a:xfrm>
-            <a:off x="5753100" y="7429500"/>
-            <a:ext cx="685800" cy="685800"/>
+            <a:off x="2906829" y="4084721"/>
+            <a:ext cx="346509" cy="346509"/>
           </a:xfrm>
           <a:prstGeom prst="rect">
             <a:avLst/>
@@ -3344,8 +3352,8 @@
         </p:blipFill>
         <p:spPr>
           <a:xfrm>
-            <a:off x="7010400" y="7429500"/>
-            <a:ext cx="685800" cy="685800"/>
+            <a:off x="3542096" y="4084721"/>
+            <a:ext cx="346509" cy="346509"/>
           </a:xfrm>
           <a:prstGeom prst="rect">
             <a:avLst/>
@@ -3368,8 +3376,8 @@
         </p:blipFill>
         <p:spPr>
           <a:xfrm>
-            <a:off x="8267700" y="7429500"/>
-            <a:ext cx="685800" cy="685800"/>
+            <a:off x="4177364" y="4084721"/>
+            <a:ext cx="346509" cy="346509"/>
           </a:xfrm>
           <a:prstGeom prst="rect">
             <a:avLst/>
@@ -3392,8 +3400,8 @@
         </p:blipFill>
         <p:spPr>
           <a:xfrm>
-            <a:off x="2800350" y="2724150"/>
-            <a:ext cx="571500" cy="571500"/>
+            <a:off x="1414913" y="1707281"/>
+            <a:ext cx="288757" cy="288757"/>
           </a:xfrm>
           <a:prstGeom prst="rect">
             <a:avLst/>
@@ -3416,8 +3424,8 @@
         </p:blipFill>
         <p:spPr>
           <a:xfrm>
-            <a:off x="11487150" y="5124450"/>
-            <a:ext cx="342900" cy="342900"/>
+            <a:off x="5804033" y="2920064"/>
+            <a:ext cx="173254" cy="173254"/>
           </a:xfrm>
           <a:prstGeom prst="rect">
             <a:avLst/>
@@ -3440,8 +3448,8 @@
         </p:blipFill>
         <p:spPr>
           <a:xfrm>
-            <a:off x="11304270" y="857250"/>
-            <a:ext cx="6629400" cy="4343400"/>
+            <a:off x="5711631" y="764005"/>
+            <a:ext cx="3349591" cy="2194560"/>
           </a:xfrm>
           <a:prstGeom prst="rect">
             <a:avLst/>
@@ -3464,8 +3472,8 @@
         </p:blipFill>
         <p:spPr>
           <a:xfrm>
-            <a:off x="12858750" y="2366010"/>
-            <a:ext cx="1005840" cy="1188720"/>
+            <a:off x="6497052" y="1526326"/>
+            <a:ext cx="508213" cy="600616"/>
           </a:xfrm>
           <a:prstGeom prst="rect">
             <a:avLst/>
@@ -3488,8 +3496,8 @@
         </p:blipFill>
         <p:spPr>
           <a:xfrm>
-            <a:off x="13041630" y="3989070"/>
-            <a:ext cx="640080" cy="640080"/>
+            <a:off x="6589455" y="2346398"/>
+            <a:ext cx="323408" cy="323408"/>
           </a:xfrm>
           <a:prstGeom prst="rect">
             <a:avLst/>
@@ -3512,8 +3520,8 @@
         </p:blipFill>
         <p:spPr>
           <a:xfrm>
-            <a:off x="15076170" y="2000250"/>
-            <a:ext cx="1143000" cy="1325880"/>
+            <a:off x="7617433" y="1341521"/>
+            <a:ext cx="577515" cy="669918"/>
           </a:xfrm>
           <a:prstGeom prst="rect">
             <a:avLst/>
@@ -3536,8 +3544,8 @@
         </p:blipFill>
         <p:spPr>
           <a:xfrm>
-            <a:off x="15327630" y="3989070"/>
-            <a:ext cx="640080" cy="640080"/>
+            <a:off x="7744486" y="2346398"/>
+            <a:ext cx="323408" cy="323408"/>
           </a:xfrm>
           <a:prstGeom prst="rect">
             <a:avLst/>
@@ -3560,8 +3568,8 @@
         </p:blipFill>
         <p:spPr>
           <a:xfrm>
-            <a:off x="12001500" y="7429500"/>
-            <a:ext cx="2857500" cy="1866900"/>
+            <a:off x="6063915" y="4084721"/>
+            <a:ext cx="1443789" cy="943275"/>
           </a:xfrm>
           <a:prstGeom prst="rect">
             <a:avLst/>
@@ -3584,8 +3592,8 @@
         </p:blipFill>
         <p:spPr>
           <a:xfrm>
-            <a:off x="14992350" y="8458200"/>
-            <a:ext cx="533400" cy="533400"/>
+            <a:off x="7575082" y="4604485"/>
+            <a:ext cx="269507" cy="269507"/>
           </a:xfrm>
           <a:prstGeom prst="rect">
             <a:avLst/>
@@ -3608,8 +3616,8 @@
         </p:blipFill>
         <p:spPr>
           <a:xfrm>
-            <a:off x="1809750" y="5105400"/>
-            <a:ext cx="1143000" cy="457200"/>
+            <a:off x="914400" y="2910438"/>
+            <a:ext cx="577515" cy="231006"/>
           </a:xfrm>
           <a:prstGeom prst="rect">
             <a:avLst/>
@@ -3632,8 +3640,8 @@
         </p:blipFill>
         <p:spPr>
           <a:xfrm>
-            <a:off x="5067300" y="3790950"/>
-            <a:ext cx="2152650" cy="666750"/>
+            <a:off x="2560320" y="2246295"/>
+            <a:ext cx="1087654" cy="336884"/>
           </a:xfrm>
           <a:prstGeom prst="rect">
             <a:avLst/>
@@ -3656,8 +3664,8 @@
         </p:blipFill>
         <p:spPr>
           <a:xfrm>
-            <a:off x="9620250" y="3714750"/>
-            <a:ext cx="2000250" cy="628650"/>
+            <a:off x="4860757" y="2207794"/>
+            <a:ext cx="1010652" cy="317633"/>
           </a:xfrm>
           <a:prstGeom prst="rect">
             <a:avLst/>
@@ -3680,8 +3688,8 @@
         </p:blipFill>
         <p:spPr>
           <a:xfrm>
-            <a:off x="9696450" y="4533900"/>
-            <a:ext cx="2076450" cy="647700"/>
+            <a:off x="4899258" y="2621681"/>
+            <a:ext cx="1049153" cy="327258"/>
           </a:xfrm>
           <a:prstGeom prst="rect">
             <a:avLst/>
@@ -3704,8 +3712,8 @@
         </p:blipFill>
         <p:spPr>
           <a:xfrm>
-            <a:off x="13201650" y="5067300"/>
-            <a:ext cx="457200" cy="2743200"/>
+            <a:off x="6670307" y="2891188"/>
+            <a:ext cx="231006" cy="1386037"/>
           </a:xfrm>
           <a:prstGeom prst="rect">
             <a:avLst/>
@@ -3720,8 +3728,8 @@
         </p:nvSpPr>
         <p:spPr>
           <a:xfrm>
-            <a:off x="571500" y="301942"/>
-            <a:ext cx="6991350" cy="609600"/>
+            <a:off x="288757" y="472359"/>
+            <a:ext cx="5471962" cy="351322"/>
           </a:xfrm>
           <a:prstGeom prst="rect">
             <a:avLst/>
@@ -3729,14 +3737,16 @@
           <a:noFill/>
         </p:spPr>
         <p:txBody>
-          <a:bodyPr wrap="none" lIns="0" rIns="0" tIns="0" bIns="0" anchor="t">
-            <a:spAutoFit/>
-          </a:bodyPr>
-          <a:lstStyle/>
-          <a:p>
-            <a:pPr algn="l"/>
-            <a:r>
-              <a:rPr sz="3450">
+          <a:bodyPr wrap="none" lIns="0" rIns="0" tIns="0" bIns="0" anchor="t"/>
+          <a:lstStyle/>
+          <a:p>
+            <a:pPr algn="l">
+              <a:lnSpc>
+                <a:spcPct val="100000"/>
+              </a:lnSpc>
+            </a:pPr>
+            <a:r>
+              <a:rPr sz="1739">
                 <a:solidFill>
                   <a:srgbClr val="264653"/>
                 </a:solidFill>
@@ -3755,8 +3765,8 @@
         </p:nvSpPr>
         <p:spPr>
           <a:xfrm>
-            <a:off x="523875" y="6384607"/>
-            <a:ext cx="1200150" cy="447675"/>
+            <a:off x="105877" y="3548593"/>
+            <a:ext cx="924025" cy="259882"/>
           </a:xfrm>
           <a:prstGeom prst="rect">
             <a:avLst/>
@@ -3764,14 +3774,16 @@
           <a:noFill/>
         </p:spPr>
         <p:txBody>
-          <a:bodyPr wrap="none" lIns="0" rIns="0" tIns="0" bIns="0" anchor="t">
-            <a:spAutoFit/>
-          </a:bodyPr>
-          <a:lstStyle/>
-          <a:p>
-            <a:pPr algn="ctr"/>
-            <a:r>
-              <a:rPr sz="2550">
+          <a:bodyPr wrap="none" lIns="0" rIns="0" tIns="0" bIns="0" anchor="t"/>
+          <a:lstStyle/>
+          <a:p>
+            <a:pPr algn="ctr">
+              <a:lnSpc>
+                <a:spcPct val="100000"/>
+              </a:lnSpc>
+            </a:pPr>
+            <a:r>
+              <a:rPr sz="1290">
                 <a:solidFill>
                   <a:srgbClr val="264653"/>
                 </a:solidFill>
@@ -3790,8 +3802,8 @@
         </p:nvSpPr>
         <p:spPr>
           <a:xfrm>
-            <a:off x="3757612" y="4632007"/>
-            <a:ext cx="1438275" cy="447675"/>
+            <a:off x="1698858" y="2663069"/>
+            <a:ext cx="1126155" cy="259882"/>
           </a:xfrm>
           <a:prstGeom prst="rect">
             <a:avLst/>
@@ -3799,14 +3811,16 @@
           <a:noFill/>
         </p:spPr>
         <p:txBody>
-          <a:bodyPr wrap="none" lIns="0" rIns="0" tIns="0" bIns="0" anchor="t">
-            <a:spAutoFit/>
-          </a:bodyPr>
-          <a:lstStyle/>
-          <a:p>
-            <a:pPr algn="ctr"/>
-            <a:r>
-              <a:rPr sz="2550">
+          <a:bodyPr wrap="none" lIns="0" rIns="0" tIns="0" bIns="0" anchor="t"/>
+          <a:lstStyle/>
+          <a:p>
+            <a:pPr algn="ctr">
+              <a:lnSpc>
+                <a:spcPct val="100000"/>
+              </a:lnSpc>
+            </a:pPr>
+            <a:r>
+              <a:rPr sz="1290">
                 <a:solidFill>
                   <a:srgbClr val="264653"/>
                 </a:solidFill>
@@ -3825,8 +3839,8 @@
         </p:nvSpPr>
         <p:spPr>
           <a:xfrm>
-            <a:off x="7124700" y="4632007"/>
-            <a:ext cx="1524000" cy="447675"/>
+            <a:off x="3400124" y="2663069"/>
+            <a:ext cx="1169469" cy="259882"/>
           </a:xfrm>
           <a:prstGeom prst="rect">
             <a:avLst/>
@@ -3834,14 +3848,16 @@
           <a:noFill/>
         </p:spPr>
         <p:txBody>
-          <a:bodyPr wrap="none" lIns="0" rIns="0" tIns="0" bIns="0" anchor="t">
-            <a:spAutoFit/>
-          </a:bodyPr>
-          <a:lstStyle/>
-          <a:p>
-            <a:pPr algn="ctr"/>
-            <a:r>
-              <a:rPr sz="2550">
+          <a:bodyPr wrap="none" lIns="0" rIns="0" tIns="0" bIns="0" anchor="t"/>
+          <a:lstStyle/>
+          <a:p>
+            <a:pPr algn="ctr">
+              <a:lnSpc>
+                <a:spcPct val="100000"/>
+              </a:lnSpc>
+            </a:pPr>
+            <a:r>
+              <a:rPr sz="1290">
                 <a:solidFill>
                   <a:srgbClr val="264653"/>
                 </a:solidFill>
@@ -3860,8 +3876,8 @@
         </p:nvSpPr>
         <p:spPr>
           <a:xfrm>
-            <a:off x="5600700" y="4386262"/>
-            <a:ext cx="1085850" cy="400050"/>
+            <a:off x="2685448" y="2539866"/>
+            <a:ext cx="837397" cy="231006"/>
           </a:xfrm>
           <a:prstGeom prst="rect">
             <a:avLst/>
@@ -3869,14 +3885,16 @@
           <a:noFill/>
         </p:spPr>
         <p:txBody>
-          <a:bodyPr wrap="none" lIns="0" rIns="0" tIns="0" bIns="0" anchor="t">
-            <a:spAutoFit/>
-          </a:bodyPr>
-          <a:lstStyle/>
-          <a:p>
-            <a:pPr algn="ctr"/>
-            <a:r>
-              <a:rPr sz="2250">
+          <a:bodyPr wrap="none" lIns="0" rIns="0" tIns="0" bIns="0" anchor="t"/>
+          <a:lstStyle/>
+          <a:p>
+            <a:pPr algn="ctr">
+              <a:lnSpc>
+                <a:spcPct val="100000"/>
+              </a:lnSpc>
+            </a:pPr>
+            <a:r>
+              <a:rPr sz="1140">
                 <a:solidFill>
                   <a:srgbClr val="2A9D8F"/>
                 </a:solidFill>
@@ -3895,8 +3913,8 @@
         </p:nvSpPr>
         <p:spPr>
           <a:xfrm>
-            <a:off x="5772150" y="5890260"/>
-            <a:ext cx="838200" cy="419100"/>
+            <a:off x="2803357" y="3299299"/>
+            <a:ext cx="649705" cy="245444"/>
           </a:xfrm>
           <a:prstGeom prst="rect">
             <a:avLst/>
@@ -3904,14 +3922,16 @@
           <a:noFill/>
         </p:spPr>
         <p:txBody>
-          <a:bodyPr wrap="none" lIns="0" rIns="0" tIns="0" bIns="0" anchor="t">
-            <a:spAutoFit/>
-          </a:bodyPr>
-          <a:lstStyle/>
-          <a:p>
-            <a:pPr algn="ctr"/>
-            <a:r>
-              <a:rPr sz="2400">
+          <a:bodyPr wrap="none" lIns="0" rIns="0" tIns="0" bIns="0" anchor="t"/>
+          <a:lstStyle/>
+          <a:p>
+            <a:pPr algn="ctr">
+              <a:lnSpc>
+                <a:spcPct val="100000"/>
+              </a:lnSpc>
+            </a:pPr>
+            <a:r>
+              <a:rPr sz="1210">
                 <a:solidFill>
                   <a:srgbClr val="264653"/>
                 </a:solidFill>
@@ -3930,8 +3950,8 @@
         </p:nvSpPr>
         <p:spPr>
           <a:xfrm>
-            <a:off x="4629150" y="6839902"/>
-            <a:ext cx="3124200" cy="504825"/>
+            <a:off x="1939490" y="3777675"/>
+            <a:ext cx="2377440" cy="288757"/>
           </a:xfrm>
           <a:prstGeom prst="rect">
             <a:avLst/>
@@ -3939,14 +3959,16 @@
           <a:noFill/>
         </p:spPr>
         <p:txBody>
-          <a:bodyPr wrap="none" lIns="0" rIns="0" tIns="0" bIns="0" anchor="t">
-            <a:spAutoFit/>
-          </a:bodyPr>
-          <a:lstStyle/>
-          <a:p>
-            <a:pPr algn="ctr"/>
-            <a:r>
-              <a:rPr sz="2850">
+          <a:bodyPr wrap="none" lIns="0" rIns="0" tIns="0" bIns="0" anchor="t"/>
+          <a:lstStyle/>
+          <a:p>
+            <a:pPr algn="ctr">
+              <a:lnSpc>
+                <a:spcPct val="100000"/>
+              </a:lnSpc>
+            </a:pPr>
+            <a:r>
+              <a:rPr sz="1440">
                 <a:solidFill>
                   <a:srgbClr val="2A9D8F"/>
                 </a:solidFill>
@@ -3965,8 +3987,8 @@
         </p:nvSpPr>
         <p:spPr>
           <a:xfrm>
-            <a:off x="3167062" y="8161972"/>
-            <a:ext cx="828675" cy="285750"/>
+            <a:off x="1472665" y="4449518"/>
+            <a:ext cx="673768" cy="168442"/>
           </a:xfrm>
           <a:prstGeom prst="rect">
             <a:avLst/>
@@ -3974,14 +3996,16 @@
           <a:noFill/>
         </p:spPr>
         <p:txBody>
-          <a:bodyPr wrap="none" lIns="0" rIns="0" tIns="0" bIns="0" anchor="t">
-            <a:spAutoFit/>
-          </a:bodyPr>
-          <a:lstStyle/>
-          <a:p>
-            <a:pPr algn="ctr"/>
-            <a:r>
-              <a:rPr sz="1650">
+          <a:bodyPr wrap="none" lIns="0" rIns="0" tIns="0" bIns="0" anchor="t"/>
+          <a:lstStyle/>
+          <a:p>
+            <a:pPr algn="ctr">
+              <a:lnSpc>
+                <a:spcPct val="100000"/>
+              </a:lnSpc>
+            </a:pPr>
+            <a:r>
+              <a:rPr sz="830">
                 <a:solidFill>
                   <a:srgbClr val="264653"/>
                 </a:solidFill>
@@ -4000,8 +4024,8 @@
         </p:nvSpPr>
         <p:spPr>
           <a:xfrm>
-            <a:off x="4481512" y="8161972"/>
-            <a:ext cx="714375" cy="285750"/>
+            <a:off x="2156058" y="4449518"/>
+            <a:ext cx="577515" cy="168442"/>
           </a:xfrm>
           <a:prstGeom prst="rect">
             <a:avLst/>
@@ -4009,14 +4033,16 @@
           <a:noFill/>
         </p:spPr>
         <p:txBody>
-          <a:bodyPr wrap="none" lIns="0" rIns="0" tIns="0" bIns="0" anchor="t">
-            <a:spAutoFit/>
-          </a:bodyPr>
-          <a:lstStyle/>
-          <a:p>
-            <a:pPr algn="ctr"/>
-            <a:r>
-              <a:rPr sz="1650">
+          <a:bodyPr wrap="none" lIns="0" rIns="0" tIns="0" bIns="0" anchor="t"/>
+          <a:lstStyle/>
+          <a:p>
+            <a:pPr algn="ctr">
+              <a:lnSpc>
+                <a:spcPct val="100000"/>
+              </a:lnSpc>
+            </a:pPr>
+            <a:r>
+              <a:rPr sz="830">
                 <a:solidFill>
                   <a:srgbClr val="264653"/>
                 </a:solidFill>
@@ -4035,8 +4061,8 @@
         </p:nvSpPr>
         <p:spPr>
           <a:xfrm>
-            <a:off x="5376862" y="8161972"/>
-            <a:ext cx="1438275" cy="285750"/>
+            <a:off x="2502568" y="4449518"/>
+            <a:ext cx="1155031" cy="168442"/>
           </a:xfrm>
           <a:prstGeom prst="rect">
             <a:avLst/>
@@ -4044,14 +4070,16 @@
           <a:noFill/>
         </p:spPr>
         <p:txBody>
-          <a:bodyPr wrap="none" lIns="0" rIns="0" tIns="0" bIns="0" anchor="t">
-            <a:spAutoFit/>
-          </a:bodyPr>
-          <a:lstStyle/>
-          <a:p>
-            <a:pPr algn="ctr"/>
-            <a:r>
-              <a:rPr sz="1650">
+          <a:bodyPr wrap="none" lIns="0" rIns="0" tIns="0" bIns="0" anchor="t"/>
+          <a:lstStyle/>
+          <a:p>
+            <a:pPr algn="ctr">
+              <a:lnSpc>
+                <a:spcPct val="100000"/>
+              </a:lnSpc>
+            </a:pPr>
+            <a:r>
+              <a:rPr sz="830">
                 <a:solidFill>
                   <a:srgbClr val="264653"/>
                 </a:solidFill>
@@ -4070,8 +4098,8 @@
         </p:nvSpPr>
         <p:spPr>
           <a:xfrm>
-            <a:off x="6510337" y="8161972"/>
-            <a:ext cx="1685925" cy="285750"/>
+            <a:off x="3041583" y="4449518"/>
+            <a:ext cx="1347536" cy="168442"/>
           </a:xfrm>
           <a:prstGeom prst="rect">
             <a:avLst/>
@@ -4079,14 +4107,16 @@
           <a:noFill/>
         </p:spPr>
         <p:txBody>
-          <a:bodyPr wrap="none" lIns="0" rIns="0" tIns="0" bIns="0" anchor="t">
-            <a:spAutoFit/>
-          </a:bodyPr>
-          <a:lstStyle/>
-          <a:p>
-            <a:pPr algn="ctr"/>
-            <a:r>
-              <a:rPr sz="1650">
+          <a:bodyPr wrap="none" lIns="0" rIns="0" tIns="0" bIns="0" anchor="t"/>
+          <a:lstStyle/>
+          <a:p>
+            <a:pPr algn="ctr">
+              <a:lnSpc>
+                <a:spcPct val="100000"/>
+              </a:lnSpc>
+            </a:pPr>
+            <a:r>
+              <a:rPr sz="830">
                 <a:solidFill>
                   <a:srgbClr val="264653"/>
                 </a:solidFill>
@@ -4105,8 +4135,8 @@
         </p:nvSpPr>
         <p:spPr>
           <a:xfrm>
-            <a:off x="8010525" y="8161972"/>
-            <a:ext cx="1200150" cy="285750"/>
+            <a:off x="3869355" y="4449518"/>
+            <a:ext cx="962526" cy="168442"/>
           </a:xfrm>
           <a:prstGeom prst="rect">
             <a:avLst/>
@@ -4114,14 +4144,16 @@
           <a:noFill/>
         </p:spPr>
         <p:txBody>
-          <a:bodyPr wrap="none" lIns="0" rIns="0" tIns="0" bIns="0" anchor="t">
-            <a:spAutoFit/>
-          </a:bodyPr>
-          <a:lstStyle/>
-          <a:p>
-            <a:pPr algn="ctr"/>
-            <a:r>
-              <a:rPr sz="1650">
+          <a:bodyPr wrap="none" lIns="0" rIns="0" tIns="0" bIns="0" anchor="t"/>
+          <a:lstStyle/>
+          <a:p>
+            <a:pPr algn="ctr">
+              <a:lnSpc>
+                <a:spcPct val="100000"/>
+              </a:lnSpc>
+            </a:pPr>
+            <a:r>
+              <a:rPr sz="830">
                 <a:solidFill>
                   <a:srgbClr val="264653"/>
                 </a:solidFill>
@@ -4140,8 +4172,8 @@
         </p:nvSpPr>
         <p:spPr>
           <a:xfrm>
-            <a:off x="2476500" y="3343275"/>
-            <a:ext cx="1219200" cy="266700"/>
+            <a:off x="1070810" y="2015289"/>
+            <a:ext cx="976964" cy="154004"/>
           </a:xfrm>
           <a:prstGeom prst="rect">
             <a:avLst/>
@@ -4149,14 +4181,16 @@
           <a:noFill/>
         </p:spPr>
         <p:txBody>
-          <a:bodyPr wrap="none" lIns="0" rIns="0" tIns="0" bIns="0" anchor="t">
-            <a:spAutoFit/>
-          </a:bodyPr>
-          <a:lstStyle/>
-          <a:p>
-            <a:pPr algn="ctr"/>
-            <a:r>
-              <a:rPr sz="1500">
+          <a:bodyPr wrap="none" lIns="0" rIns="0" tIns="0" bIns="0" anchor="t"/>
+          <a:lstStyle/>
+          <a:p>
+            <a:pPr algn="ctr">
+              <a:lnSpc>
+                <a:spcPct val="100000"/>
+              </a:lnSpc>
+            </a:pPr>
+            <a:r>
+              <a:rPr sz="760">
                 <a:solidFill>
                   <a:srgbClr val="264653"/>
                 </a:solidFill>
@@ -4175,8 +4209,8 @@
         </p:nvSpPr>
         <p:spPr>
           <a:xfrm>
-            <a:off x="10001250" y="3511867"/>
-            <a:ext cx="1219200" cy="342900"/>
+            <a:off x="4892040" y="2099029"/>
+            <a:ext cx="938463" cy="197317"/>
           </a:xfrm>
           <a:prstGeom prst="rect">
             <a:avLst/>
@@ -4184,14 +4218,16 @@
           <a:noFill/>
         </p:spPr>
         <p:txBody>
-          <a:bodyPr wrap="none" lIns="0" rIns="0" tIns="0" bIns="0" anchor="t">
-            <a:spAutoFit/>
-          </a:bodyPr>
-          <a:lstStyle/>
-          <a:p>
-            <a:pPr algn="ctr"/>
-            <a:r>
-              <a:rPr sz="1950">
+          <a:bodyPr wrap="none" lIns="0" rIns="0" tIns="0" bIns="0" anchor="t"/>
+          <a:lstStyle/>
+          <a:p>
+            <a:pPr algn="ctr">
+              <a:lnSpc>
+                <a:spcPct val="100000"/>
+              </a:lnSpc>
+            </a:pPr>
+            <a:r>
+              <a:rPr sz="990">
                 <a:solidFill>
                   <a:srgbClr val="264653"/>
                 </a:solidFill>
@@ -4210,8 +4246,8 @@
         </p:nvSpPr>
         <p:spPr>
           <a:xfrm>
-            <a:off x="10010775" y="5131117"/>
-            <a:ext cx="1466850" cy="342900"/>
+            <a:off x="4865570" y="2917176"/>
+            <a:ext cx="1126155" cy="197317"/>
           </a:xfrm>
           <a:prstGeom prst="rect">
             <a:avLst/>
@@ -4219,14 +4255,16 @@
           <a:noFill/>
         </p:spPr>
         <p:txBody>
-          <a:bodyPr wrap="none" lIns="0" rIns="0" tIns="0" bIns="0" anchor="t">
-            <a:spAutoFit/>
-          </a:bodyPr>
-          <a:lstStyle/>
-          <a:p>
-            <a:pPr algn="ctr"/>
-            <a:r>
-              <a:rPr sz="1950">
+          <a:bodyPr wrap="none" lIns="0" rIns="0" tIns="0" bIns="0" anchor="t"/>
+          <a:lstStyle/>
+          <a:p>
+            <a:pPr algn="ctr">
+              <a:lnSpc>
+                <a:spcPct val="100000"/>
+              </a:lnSpc>
+            </a:pPr>
+            <a:r>
+              <a:rPr sz="990">
                 <a:solidFill>
                   <a:srgbClr val="B7801F"/>
                 </a:solidFill>
@@ -4245,8 +4283,8 @@
         </p:nvSpPr>
         <p:spPr>
           <a:xfrm>
-            <a:off x="12599670" y="3557587"/>
-            <a:ext cx="1524000" cy="447675"/>
+            <a:off x="6166424" y="2120204"/>
+            <a:ext cx="1169469" cy="259882"/>
           </a:xfrm>
           <a:prstGeom prst="rect">
             <a:avLst/>
@@ -4254,14 +4292,16 @@
           <a:noFill/>
         </p:spPr>
         <p:txBody>
-          <a:bodyPr wrap="none" lIns="0" rIns="0" tIns="0" bIns="0" anchor="t">
-            <a:spAutoFit/>
-          </a:bodyPr>
-          <a:lstStyle/>
-          <a:p>
-            <a:pPr algn="ctr"/>
-            <a:r>
-              <a:rPr sz="2550">
+          <a:bodyPr wrap="none" lIns="0" rIns="0" tIns="0" bIns="0" anchor="t"/>
+          <a:lstStyle/>
+          <a:p>
+            <a:pPr algn="ctr">
+              <a:lnSpc>
+                <a:spcPct val="100000"/>
+              </a:lnSpc>
+            </a:pPr>
+            <a:r>
+              <a:rPr sz="1290">
                 <a:solidFill>
                   <a:srgbClr val="264653"/>
                 </a:solidFill>
@@ -4280,8 +4320,8 @@
         </p:nvSpPr>
         <p:spPr>
           <a:xfrm>
-            <a:off x="12461557" y="4683442"/>
-            <a:ext cx="1800225" cy="285750"/>
+            <a:off x="6029264" y="2691945"/>
+            <a:ext cx="1443789" cy="168442"/>
           </a:xfrm>
           <a:prstGeom prst="rect">
             <a:avLst/>
@@ -4289,14 +4329,16 @@
           <a:noFill/>
         </p:spPr>
         <p:txBody>
-          <a:bodyPr wrap="none" lIns="0" rIns="0" tIns="0" bIns="0" anchor="t">
-            <a:spAutoFit/>
-          </a:bodyPr>
-          <a:lstStyle/>
-          <a:p>
-            <a:pPr algn="ctr"/>
-            <a:r>
-              <a:rPr sz="1650">
+          <a:bodyPr wrap="none" lIns="0" rIns="0" tIns="0" bIns="0" anchor="t"/>
+          <a:lstStyle/>
+          <a:p>
+            <a:pPr algn="ctr">
+              <a:lnSpc>
+                <a:spcPct val="100000"/>
+              </a:lnSpc>
+            </a:pPr>
+            <a:r>
+              <a:rPr sz="830">
                 <a:solidFill>
                   <a:srgbClr val="264653"/>
                 </a:solidFill>
@@ -4315,8 +4357,8 @@
         </p:nvSpPr>
         <p:spPr>
           <a:xfrm>
-            <a:off x="14885670" y="3557587"/>
-            <a:ext cx="1524000" cy="447675"/>
+            <a:off x="7321456" y="2120204"/>
+            <a:ext cx="1169469" cy="259882"/>
           </a:xfrm>
           <a:prstGeom prst="rect">
             <a:avLst/>
@@ -4324,14 +4366,16 @@
           <a:noFill/>
         </p:spPr>
         <p:txBody>
-          <a:bodyPr wrap="none" lIns="0" rIns="0" tIns="0" bIns="0" anchor="t">
-            <a:spAutoFit/>
-          </a:bodyPr>
-          <a:lstStyle/>
-          <a:p>
-            <a:pPr algn="ctr"/>
-            <a:r>
-              <a:rPr sz="2550">
+          <a:bodyPr wrap="none" lIns="0" rIns="0" tIns="0" bIns="0" anchor="t"/>
+          <a:lstStyle/>
+          <a:p>
+            <a:pPr algn="ctr">
+              <a:lnSpc>
+                <a:spcPct val="100000"/>
+              </a:lnSpc>
+            </a:pPr>
+            <a:r>
+              <a:rPr sz="1290">
                 <a:solidFill>
                   <a:srgbClr val="264653"/>
                 </a:solidFill>
@@ -4350,8 +4394,8 @@
         </p:nvSpPr>
         <p:spPr>
           <a:xfrm>
-            <a:off x="14442757" y="4683442"/>
-            <a:ext cx="2409825" cy="285750"/>
+            <a:off x="6943664" y="2691945"/>
+            <a:ext cx="1925052" cy="168442"/>
           </a:xfrm>
           <a:prstGeom prst="rect">
             <a:avLst/>
@@ -4359,14 +4403,16 @@
           <a:noFill/>
         </p:spPr>
         <p:txBody>
-          <a:bodyPr wrap="none" lIns="0" rIns="0" tIns="0" bIns="0" anchor="t">
-            <a:spAutoFit/>
-          </a:bodyPr>
-          <a:lstStyle/>
-          <a:p>
-            <a:pPr algn="ctr"/>
-            <a:r>
-              <a:rPr sz="1650">
+          <a:bodyPr wrap="none" lIns="0" rIns="0" tIns="0" bIns="0" anchor="t"/>
+          <a:lstStyle/>
+          <a:p>
+            <a:pPr algn="ctr">
+              <a:lnSpc>
+                <a:spcPct val="100000"/>
+              </a:lnSpc>
+            </a:pPr>
+            <a:r>
+              <a:rPr sz="830">
                 <a:solidFill>
                   <a:srgbClr val="264653"/>
                 </a:solidFill>
@@ -4385,8 +4431,8 @@
         </p:nvSpPr>
         <p:spPr>
           <a:xfrm>
-            <a:off x="13554075" y="420052"/>
-            <a:ext cx="2038350" cy="504825"/>
+            <a:off x="6583680" y="533961"/>
+            <a:ext cx="1559292" cy="288757"/>
           </a:xfrm>
           <a:prstGeom prst="rect">
             <a:avLst/>
@@ -4394,14 +4440,16 @@
           <a:noFill/>
         </p:spPr>
         <p:txBody>
-          <a:bodyPr wrap="none" lIns="0" rIns="0" tIns="0" bIns="0" anchor="t">
-            <a:spAutoFit/>
-          </a:bodyPr>
-          <a:lstStyle/>
-          <a:p>
-            <a:pPr algn="ctr"/>
-            <a:r>
-              <a:rPr sz="2850">
+          <a:bodyPr wrap="none" lIns="0" rIns="0" tIns="0" bIns="0" anchor="t"/>
+          <a:lstStyle/>
+          <a:p>
+            <a:pPr algn="ctr">
+              <a:lnSpc>
+                <a:spcPct val="100000"/>
+              </a:lnSpc>
+            </a:pPr>
+            <a:r>
+              <a:rPr sz="1440">
                 <a:solidFill>
                   <a:srgbClr val="264653"/>
                 </a:solidFill>
@@ -4420,8 +4468,8 @@
         </p:nvSpPr>
         <p:spPr>
           <a:xfrm>
-            <a:off x="14992350" y="7601902"/>
-            <a:ext cx="1314450" cy="504825"/>
+            <a:off x="7575082" y="4162685"/>
+            <a:ext cx="1010652" cy="288757"/>
           </a:xfrm>
           <a:prstGeom prst="rect">
             <a:avLst/>
@@ -4429,14 +4477,16 @@
           <a:noFill/>
         </p:spPr>
         <p:txBody>
-          <a:bodyPr wrap="none" lIns="0" rIns="0" tIns="0" bIns="0" anchor="t">
-            <a:spAutoFit/>
-          </a:bodyPr>
-          <a:lstStyle/>
-          <a:p>
-            <a:pPr algn="l"/>
-            <a:r>
-              <a:rPr sz="2850">
+          <a:bodyPr wrap="none" lIns="0" rIns="0" tIns="0" bIns="0" anchor="t"/>
+          <a:lstStyle/>
+          <a:p>
+            <a:pPr algn="l">
+              <a:lnSpc>
+                <a:spcPct val="100000"/>
+              </a:lnSpc>
+            </a:pPr>
+            <a:r>
+              <a:rPr sz="1440">
                 <a:solidFill>
                   <a:srgbClr val="264653"/>
                 </a:solidFill>
@@ -4455,8 +4505,8 @@
         </p:nvSpPr>
         <p:spPr>
           <a:xfrm>
-            <a:off x="14992350" y="8123872"/>
-            <a:ext cx="2533650" cy="285750"/>
+            <a:off x="7575082" y="4430268"/>
+            <a:ext cx="1568917" cy="168442"/>
           </a:xfrm>
           <a:prstGeom prst="rect">
             <a:avLst/>
@@ -4464,14 +4514,16 @@
           <a:noFill/>
         </p:spPr>
         <p:txBody>
-          <a:bodyPr wrap="none" lIns="0" rIns="0" tIns="0" bIns="0" anchor="t">
-            <a:spAutoFit/>
-          </a:bodyPr>
-          <a:lstStyle/>
-          <a:p>
-            <a:pPr algn="l"/>
-            <a:r>
-              <a:rPr sz="1650">
+          <a:bodyPr wrap="none" lIns="0" rIns="0" tIns="0" bIns="0" anchor="t"/>
+          <a:lstStyle/>
+          <a:p>
+            <a:pPr algn="l">
+              <a:lnSpc>
+                <a:spcPct val="100000"/>
+              </a:lnSpc>
+            </a:pPr>
+            <a:r>
+              <a:rPr sz="830">
                 <a:solidFill>
                   <a:srgbClr val="264653"/>
                 </a:solidFill>
@@ -4490,8 +4542,8 @@
         </p:nvSpPr>
         <p:spPr>
           <a:xfrm>
-            <a:off x="15601950" y="8579167"/>
-            <a:ext cx="1514475" cy="342900"/>
+            <a:off x="7883090" y="4659349"/>
+            <a:ext cx="1212783" cy="197317"/>
           </a:xfrm>
           <a:prstGeom prst="rect">
             <a:avLst/>
@@ -4499,14 +4551,16 @@
           <a:noFill/>
         </p:spPr>
         <p:txBody>
-          <a:bodyPr wrap="none" lIns="0" rIns="0" tIns="0" bIns="0" anchor="t">
-            <a:spAutoFit/>
-          </a:bodyPr>
-          <a:lstStyle/>
-          <a:p>
-            <a:pPr algn="l"/>
-            <a:r>
-              <a:rPr sz="1950">
+          <a:bodyPr wrap="none" lIns="0" rIns="0" tIns="0" bIns="0" anchor="t"/>
+          <a:lstStyle/>
+          <a:p>
+            <a:pPr algn="l">
+              <a:lnSpc>
+                <a:spcPct val="100000"/>
+              </a:lnSpc>
+            </a:pPr>
+            <a:r>
+              <a:rPr sz="990">
                 <a:solidFill>
                   <a:srgbClr val="264653"/>
                 </a:solidFill>
